--- a/assets/pptx/catalog-706.pptx
+++ b/assets/pptx/catalog-706.pptx
@@ -3749,7 +3749,7 @@
                 <a:ea typeface="Ebrima"/>
                 <a:cs typeface="Ebrima"/>
               </a:rPr>
-              <a:t>(2*)</a:t>
+              <a:t>2*</a:t>
             </a:r>
           </a:p>
         </p:txBody>
@@ -4486,7 +4486,7 @@
                 <a:ea typeface="Ebrima"/>
                 <a:cs typeface="Ebrima"/>
               </a:rPr>
-              <a:t>(2*)</a:t>
+              <a:t>2*</a:t>
             </a:r>
           </a:p>
         </p:txBody>
@@ -5223,7 +5223,7 @@
                 <a:ea typeface="Ebrima"/>
                 <a:cs typeface="Ebrima"/>
               </a:rPr>
-              <a:t>(2*)</a:t>
+              <a:t>2*</a:t>
             </a:r>
           </a:p>
         </p:txBody>
@@ -5759,7 +5759,7 @@
                 <a:ea typeface="Ebrima"/>
                 <a:cs typeface="Ebrima"/>
               </a:rPr>
-              <a:t>ኪሩቤል ሱራፌል እንደሚያመልኩህ, መላዕክት በአንድነት እንደሚሰግዱልህ, እኔም አመልክሀለው, ይኸው በፊትህ, (2*)</a:t>
+              <a:t>ኪሩቤል ሱራፌል እንደሚያመልኩህ, መላዕክት በአንድነት እንደሚሰግዱልህ, እኔም አመልክሀለው, ይኸው በፊትህ, 2*</a:t>
             </a:r>
           </a:p>
         </p:txBody>
